--- a/assets/pptx/catalog-759.pptx
+++ b/assets/pptx/catalog-759.pptx
@@ -3391,7 +3391,7 @@
                 <a:ea typeface="Ebrima"/>
                 <a:cs typeface="Ebrima"/>
               </a:rPr>
-              <a:t>ዮሐንስ የመሰከረለት የእግዚአብሔር በግ (2x)</a:t>
+              <a:t>ዮሐንስ የመሰከረለት የእግዚአብሔር በግ 2x</a:t>
             </a:r>
           </a:p>
         </p:txBody>
@@ -3793,7 +3793,7 @@
                 <a:ea typeface="Ebrima"/>
                 <a:cs typeface="Ebrima"/>
               </a:rPr>
-              <a:t>ዮሐንስ የመሰከረለት የእግዚአብሔር በግ (2x)</a:t>
+              <a:t>ዮሐንስ የመሰከረለት የእግዚአብሔር በግ 2x</a:t>
             </a:r>
           </a:p>
         </p:txBody>
@@ -4195,7 +4195,7 @@
                 <a:ea typeface="Ebrima"/>
                 <a:cs typeface="Ebrima"/>
               </a:rPr>
-              <a:t>ዮሐንስ የመሰከረለት የእግዚአብሔር በግ (2x)</a:t>
+              <a:t>ዮሐንስ የመሰከረለት የእግዚአብሔር በግ 2x</a:t>
             </a:r>
           </a:p>
         </p:txBody>
